--- a/GPTI-Tema-5/Actividad 5.3 Banco de ejercicios_CynthiaMorales_GPTI_7ISCM.docx.pptx
+++ b/GPTI-Tema-5/Actividad 5.3 Banco de ejercicios_CynthiaMorales_GPTI_7ISCM.docx.pptx
@@ -5,7 +5,7 @@
     <p:sldMasterId id="2147483648" r:id="rId1"/>
   </p:sldMasterIdLst>
   <p:notesMasterIdLst>
-    <p:notesMasterId r:id="rId11"/>
+    <p:notesMasterId r:id="rId12"/>
   </p:notesMasterIdLst>
   <p:sldIdLst>
     <p:sldId id="256" r:id="rId2"/>
@@ -17,6 +17,7 @@
     <p:sldId id="262" r:id="rId8"/>
     <p:sldId id="263" r:id="rId9"/>
     <p:sldId id="264" r:id="rId10"/>
+    <p:sldId id="265" r:id="rId11"/>
   </p:sldIdLst>
   <p:sldSz cx="12192000" cy="6858000"/>
   <p:notesSz cx="6858000" cy="12192000"/>
@@ -1153,7 +1154,7 @@
           </a:prstGeom>
           <a:extLst>
             <a:ext uri="{C572A759-6A51-4108-AA02-DFA0A04FC94B}">
-              <ma14:wrappingTextBoxFlag xmlns:ma14="http://schemas.microsoft.com/office/mac/drawingml/2011/main" xmlns="" val="0"/>
+              <ma14:wrappingTextBoxFlag xmlns="" xmlns:ma14="http://schemas.microsoft.com/office/mac/drawingml/2011/main" val="0"/>
             </a:ext>
           </a:extLst>
         </p:spPr>
@@ -1228,7 +1229,7 @@
           </a:prstGeom>
           <a:extLst>
             <a:ext uri="{C572A759-6A51-4108-AA02-DFA0A04FC94B}">
-              <ma14:wrappingTextBoxFlag xmlns:ma14="http://schemas.microsoft.com/office/mac/drawingml/2011/main" xmlns="" val="0"/>
+              <ma14:wrappingTextBoxFlag xmlns="" xmlns:ma14="http://schemas.microsoft.com/office/mac/drawingml/2011/main" val="0"/>
             </a:ext>
           </a:extLst>
         </p:spPr>
@@ -2099,6 +2100,115 @@
 </p:sld>
 </file>
 
+<file path=ppt/slides/slide10.xml><?xml version="1.0" encoding="utf-8"?>
+<p:sld xmlns:a="http://schemas.openxmlformats.org/drawingml/2006/main" xmlns:r="http://schemas.openxmlformats.org/officeDocument/2006/relationships" xmlns:p="http://schemas.openxmlformats.org/presentationml/2006/main">
+  <p:cSld>
+    <p:spTree>
+      <p:nvGrpSpPr>
+        <p:cNvPr id="1" name=""/>
+        <p:cNvGrpSpPr/>
+        <p:nvPr/>
+      </p:nvGrpSpPr>
+      <p:grpSpPr>
+        <a:xfrm>
+          <a:off x="0" y="0"/>
+          <a:ext cx="0" cy="0"/>
+          <a:chOff x="0" y="0"/>
+          <a:chExt cx="0" cy="0"/>
+        </a:xfrm>
+      </p:grpSpPr>
+      <p:sp>
+        <p:nvSpPr>
+          <p:cNvPr id="3" name="CuadroTexto 2">
+            <a:hlinkClick r:id="rId2"/>
+            <a:extLst>
+              <a:ext uri="{FF2B5EF4-FFF2-40B4-BE49-F238E27FC236}">
+                <a16:creationId xmlns:a16="http://schemas.microsoft.com/office/drawing/2014/main" id="{C6CFB100-EBF3-0C23-B768-00F029B6868E}"/>
+              </a:ext>
+            </a:extLst>
+          </p:cNvPr>
+          <p:cNvSpPr txBox="1"/>
+          <p:nvPr/>
+        </p:nvSpPr>
+        <p:spPr>
+          <a:xfrm>
+            <a:off x="1087120" y="2828836"/>
+            <a:ext cx="10901680" cy="646331"/>
+          </a:xfrm>
+          <a:prstGeom prst="rect">
+            <a:avLst/>
+          </a:prstGeom>
+          <a:noFill/>
+        </p:spPr>
+        <p:txBody>
+          <a:bodyPr wrap="square">
+            <a:spAutoFit/>
+          </a:bodyPr>
+          <a:lstStyle/>
+          <a:p>
+            <a:r>
+              <a:rPr lang="es-MX" dirty="0"/>
+              <a:t>https://github.com/Cynthia21Morales/GPTI_CynthiaJasmineMT/blob/main/GPTI-Tema-5/Actividad%205.3%20Banco%20de%20ejercicios_CynthiaMorales_GPTI_7ISCM.docx.pptx</a:t>
+            </a:r>
+          </a:p>
+        </p:txBody>
+      </p:sp>
+      <p:sp>
+        <p:nvSpPr>
+          <p:cNvPr id="4" name="CuadroTexto 3">
+            <a:extLst>
+              <a:ext uri="{FF2B5EF4-FFF2-40B4-BE49-F238E27FC236}">
+                <a16:creationId xmlns:a16="http://schemas.microsoft.com/office/drawing/2014/main" id="{F5B84E2A-D710-7913-0346-9EE2F8582B72}"/>
+              </a:ext>
+            </a:extLst>
+          </p:cNvPr>
+          <p:cNvSpPr txBox="1"/>
+          <p:nvPr/>
+        </p:nvSpPr>
+        <p:spPr>
+          <a:xfrm>
+            <a:off x="904240" y="1371600"/>
+            <a:ext cx="9357360" cy="369332"/>
+          </a:xfrm>
+          <a:prstGeom prst="rect">
+            <a:avLst/>
+          </a:prstGeom>
+          <a:noFill/>
+        </p:spPr>
+        <p:txBody>
+          <a:bodyPr wrap="square" rtlCol="0">
+            <a:spAutoFit/>
+          </a:bodyPr>
+          <a:lstStyle/>
+          <a:p>
+            <a:r>
+              <a:rPr lang="es-MX" dirty="0"/>
+              <a:t>ANEXO LINK DE LA ACTIVIDAD SOLICITADA Y ENVIADA </a:t>
+            </a:r>
+            <a:r>
+              <a:rPr lang="es-MX"/>
+              <a:t>POR GITHUB</a:t>
+            </a:r>
+            <a:r>
+              <a:rPr lang="es-MX" dirty="0"/>
+              <a:t>:</a:t>
+            </a:r>
+          </a:p>
+        </p:txBody>
+      </p:sp>
+    </p:spTree>
+    <p:extLst>
+      <p:ext uri="{BB962C8B-B14F-4D97-AF65-F5344CB8AC3E}">
+        <p14:creationId xmlns:p14="http://schemas.microsoft.com/office/powerpoint/2010/main" val="4111677903"/>
+      </p:ext>
+    </p:extLst>
+  </p:cSld>
+  <p:clrMapOvr>
+    <a:masterClrMapping/>
+  </p:clrMapOvr>
+</p:sld>
+</file>
+
 <file path=ppt/slides/slide2.xml><?xml version="1.0" encoding="utf-8"?>
 <p:sld xmlns:a="http://schemas.openxmlformats.org/drawingml/2006/main" xmlns:r="http://schemas.openxmlformats.org/officeDocument/2006/relationships" xmlns:p="http://schemas.openxmlformats.org/presentationml/2006/main">
   <p:cSld name="Slide 2">
@@ -2294,7 +2404,7 @@
           </a:prstGeom>
           <a:extLst>
             <a:ext uri="{C572A759-6A51-4108-AA02-DFA0A04FC94B}">
-              <ma14:wrappingTextBoxFlag xmlns:ma14="http://schemas.microsoft.com/office/mac/drawingml/2011/main" xmlns="" val="0"/>
+              <ma14:wrappingTextBoxFlag xmlns="" xmlns:ma14="http://schemas.microsoft.com/office/mac/drawingml/2011/main" val="0"/>
             </a:ext>
           </a:extLst>
         </p:spPr>
@@ -2522,7 +2632,7 @@
           </a:prstGeom>
           <a:extLst>
             <a:ext uri="{C572A759-6A51-4108-AA02-DFA0A04FC94B}">
-              <ma14:wrappingTextBoxFlag xmlns:ma14="http://schemas.microsoft.com/office/mac/drawingml/2011/main" xmlns="" val="0"/>
+              <ma14:wrappingTextBoxFlag xmlns="" xmlns:ma14="http://schemas.microsoft.com/office/mac/drawingml/2011/main" val="0"/>
             </a:ext>
           </a:extLst>
         </p:spPr>
@@ -3562,7 +3672,7 @@
           </a:prstGeom>
           <a:extLst>
             <a:ext uri="{C572A759-6A51-4108-AA02-DFA0A04FC94B}">
-              <ma14:wrappingTextBoxFlag xmlns:ma14="http://schemas.microsoft.com/office/mac/drawingml/2011/main" xmlns="" val="0"/>
+              <ma14:wrappingTextBoxFlag xmlns="" xmlns:ma14="http://schemas.microsoft.com/office/mac/drawingml/2011/main" val="0"/>
             </a:ext>
           </a:extLst>
         </p:spPr>
@@ -3797,7 +3907,7 @@
           </a:prstGeom>
           <a:extLst>
             <a:ext uri="{C572A759-6A51-4108-AA02-DFA0A04FC94B}">
-              <ma14:wrappingTextBoxFlag xmlns:ma14="http://schemas.microsoft.com/office/mac/drawingml/2011/main" xmlns="" val="0"/>
+              <ma14:wrappingTextBoxFlag xmlns="" xmlns:ma14="http://schemas.microsoft.com/office/mac/drawingml/2011/main" val="0"/>
             </a:ext>
           </a:extLst>
         </p:spPr>
@@ -4074,7 +4184,7 @@
           </a:prstGeom>
           <a:extLst>
             <a:ext uri="{C572A759-6A51-4108-AA02-DFA0A04FC94B}">
-              <ma14:wrappingTextBoxFlag xmlns:ma14="http://schemas.microsoft.com/office/mac/drawingml/2011/main" xmlns="" val="0"/>
+              <ma14:wrappingTextBoxFlag xmlns="" xmlns:ma14="http://schemas.microsoft.com/office/mac/drawingml/2011/main" val="0"/>
             </a:ext>
           </a:extLst>
         </p:spPr>
@@ -5106,7 +5216,7 @@
           </a:prstGeom>
           <a:extLst>
             <a:ext uri="{C572A759-6A51-4108-AA02-DFA0A04FC94B}">
-              <ma14:wrappingTextBoxFlag xmlns:ma14="http://schemas.microsoft.com/office/mac/drawingml/2011/main" xmlns="" val="0"/>
+              <ma14:wrappingTextBoxFlag xmlns="" xmlns:ma14="http://schemas.microsoft.com/office/mac/drawingml/2011/main" val="0"/>
             </a:ext>
           </a:extLst>
         </p:spPr>
@@ -6360,7 +6470,7 @@
           </a:prstGeom>
           <a:extLst>
             <a:ext uri="{C572A759-6A51-4108-AA02-DFA0A04FC94B}">
-              <ma14:wrappingTextBoxFlag xmlns:ma14="http://schemas.microsoft.com/office/mac/drawingml/2011/main" xmlns="" val="0"/>
+              <ma14:wrappingTextBoxFlag xmlns="" xmlns:ma14="http://schemas.microsoft.com/office/mac/drawingml/2011/main" val="0"/>
             </a:ext>
           </a:extLst>
         </p:spPr>
@@ -6606,7 +6716,7 @@
           </a:prstGeom>
           <a:extLst>
             <a:ext uri="{C572A759-6A51-4108-AA02-DFA0A04FC94B}">
-              <ma14:wrappingTextBoxFlag xmlns:ma14="http://schemas.microsoft.com/office/mac/drawingml/2011/main" xmlns="" val="0"/>
+              <ma14:wrappingTextBoxFlag xmlns="" xmlns:ma14="http://schemas.microsoft.com/office/mac/drawingml/2011/main" val="0"/>
             </a:ext>
           </a:extLst>
         </p:spPr>
